--- a/curso/pptx/S62.pptx
+++ b/curso/pptx/S62.pptx
@@ -5233,7 +5233,7 @@
                 </a:solidFill>
                 <a:latin typeface="Nunito Sans"/>
               </a:rPr>
-              <a:t>Repetir como un loro, palabra por palabra</a:t>
+              <a:t>像鹦鹉一样一字不差地重复</a:t>
             </a:r>
           </a:p>
           <a:p>
@@ -5258,7 +5258,7 @@
                 </a:solidFill>
                 <a:latin typeface="Nunito Sans"/>
               </a:rPr>
-              <a:t>Cambiar lo que dijo (hombre de paja, 第15课)</a:t>
+              <a:t>改变他说过的话（稻草人，第15课）</a:t>
             </a:r>
           </a:p>
           <a:p>
@@ -5283,7 +5283,7 @@
                 </a:solidFill>
                 <a:latin typeface="Nunito Sans"/>
               </a:rPr>
-              <a:t>Darle la razón</a:t>
+              <a:t>对他说“你说得对”</a:t>
             </a:r>
           </a:p>
         </p:txBody>
@@ -5413,7 +5413,7 @@
                 </a:solidFill>
                 <a:latin typeface="Nunito Sans"/>
               </a:rPr>
-              <a:t>Decirlo con tus palabras</a:t>
+              <a:t>用你自己的话说出来</a:t>
             </a:r>
           </a:p>
           <a:p>
@@ -5438,7 +5438,7 @@
                 </a:solidFill>
                 <a:latin typeface="Nunito Sans"/>
               </a:rPr>
-              <a:t>Comprobar: «¿Es eso lo que quieres decir?»</a:t>
+              <a:t>核对：“你是这个意思吗？”</a:t>
             </a:r>
           </a:p>
           <a:p>
@@ -5463,7 +5463,7 @@
                 </a:solidFill>
                 <a:latin typeface="Nunito Sans"/>
               </a:rPr>
-              <a:t>Entender antes de estar de acuerdo o no</a:t>
+              <a:t>在决定同意与否之前先理解</a:t>
             </a:r>
           </a:p>
         </p:txBody>
@@ -7257,7 +7257,7 @@
                 </a:solidFill>
                 <a:latin typeface="Nunito Sans"/>
               </a:rPr>
-              <a:t>Oír:</a:t>
+              <a:t>听见：</a:t>
             </a:r>
             <a:r>
               <a:rPr sz="2800" b="0">
@@ -7266,7 +7266,7 @@
                 </a:solidFill>
                 <a:latin typeface="Nunito Sans"/>
               </a:rPr>
-              <a:t> el sonido te llega</a:t>
+              <a:t>声音传到了你这里</a:t>
             </a:r>
           </a:p>
           <a:p>
@@ -7291,7 +7291,7 @@
                 </a:solidFill>
                 <a:latin typeface="Nunito Sans"/>
               </a:rPr>
-              <a:t>Escuchar:</a:t>
+              <a:t>倾听：</a:t>
             </a:r>
             <a:r>
               <a:rPr sz="2800" b="0">
@@ -7300,7 +7300,7 @@
                 </a:solidFill>
                 <a:latin typeface="Nunito Sans"/>
               </a:rPr>
-              <a:t> entiendes lo que te dicen</a:t>
+              <a:t>你理解了别人对你说的话</a:t>
             </a:r>
           </a:p>
           <a:p>
@@ -7325,7 +7325,7 @@
                 </a:solidFill>
                 <a:latin typeface="Nunito Sans"/>
               </a:rPr>
-              <a:t>Si no sabes repetirlo, no lo has escuchado</a:t>
+              <a:t>如果你不能重述，你就没有听进去</a:t>
             </a:r>
           </a:p>
         </p:txBody>
@@ -7516,7 +7516,7 @@
                 </a:solidFill>
                 <a:latin typeface="Nunito Sans"/>
               </a:rPr>
-              <a:t>Respetar el turno de palabra:</a:t>
+              <a:t>遵守发言顺序：</a:t>
             </a:r>
             <a:r>
               <a:rPr sz="2800" b="0">
@@ -7525,7 +7525,7 @@
                 </a:solidFill>
                 <a:latin typeface="Nunito Sans"/>
               </a:rPr>
-              <a:t> hablar de uno en uno, sin cortar.</a:t>
+              <a:t>一个一个地说，不打断。</a:t>
             </a:r>
           </a:p>
           <a:p>
@@ -7550,7 +7550,7 @@
                 </a:solidFill>
                 <a:latin typeface="Nunito Sans"/>
               </a:rPr>
-              <a:t>Reformular:</a:t>
+              <a:t>转述：</a:t>
             </a:r>
             <a:r>
               <a:rPr sz="2800" b="0">
@@ -7559,7 +7559,7 @@
                 </a:solidFill>
                 <a:latin typeface="Nunito Sans"/>
               </a:rPr>
-              <a:t> «¿Quieres decir que…?».</a:t>
+              <a:t>“你是想说……吗？”</a:t>
             </a:r>
           </a:p>
           <a:p>
@@ -7584,7 +7584,7 @@
                 </a:solidFill>
                 <a:latin typeface="Nunito Sans"/>
               </a:rPr>
-              <a:t>Pedir razones:</a:t>
+              <a:t>要求理由：</a:t>
             </a:r>
             <a:r>
               <a:rPr sz="2800" b="0">
@@ -7593,7 +7593,7 @@
                 </a:solidFill>
                 <a:latin typeface="Nunito Sans"/>
               </a:rPr>
-              <a:t> «¿Por qué lo piensas?», «¿Cómo lo sabes?».</a:t>
+              <a:t>“你为什么这样想？”“你怎么知道的？”</a:t>
             </a:r>
           </a:p>
         </p:txBody>
@@ -7827,7 +7827,7 @@
                 </a:solidFill>
                 <a:latin typeface="Nunito Sans"/>
               </a:rPr>
-              <a:t>Preparo mi respuesta mientras habla</a:t>
+              <a:t>他说话的时候，我在准备我的回答</a:t>
             </a:r>
           </a:p>
           <a:p>
@@ -7852,7 +7852,7 @@
                 </a:solidFill>
                 <a:latin typeface="Nunito Sans"/>
               </a:rPr>
-              <a:t>Le corto a la mitad</a:t>
+              <a:t>我说到一半就打断他</a:t>
             </a:r>
           </a:p>
           <a:p>
@@ -7877,7 +7877,7 @@
                 </a:solidFill>
                 <a:latin typeface="Nunito Sans"/>
               </a:rPr>
-              <a:t>Contesto a lo que yo creía</a:t>
+              <a:t>我回答的是我以为他说的</a:t>
             </a:r>
           </a:p>
         </p:txBody>
@@ -8007,7 +8007,7 @@
                 </a:solidFill>
                 <a:latin typeface="Nunito Sans"/>
               </a:rPr>
-              <a:t>Espero a que acabe</a:t>
+              <a:t>我等他说完</a:t>
             </a:r>
           </a:p>
           <a:p>
@@ -8032,7 +8032,7 @@
                 </a:solidFill>
                 <a:latin typeface="Nunito Sans"/>
               </a:rPr>
-              <a:t>Compruebo si lo he entendido</a:t>
+              <a:t>我核对自己是否理解了</a:t>
             </a:r>
           </a:p>
           <a:p>
@@ -8057,7 +8057,7 @@
                 </a:solidFill>
                 <a:latin typeface="Nunito Sans"/>
               </a:rPr>
-              <a:t>Contesto a lo que ha dicho</a:t>
+              <a:t>我回答的是他说过的话</a:t>
             </a:r>
           </a:p>
         </p:txBody>

--- a/curso/pptx/S62.pptx
+++ b/curso/pptx/S62.pptx
@@ -4129,7 +4129,7 @@
                 </a:solidFill>
                 <a:latin typeface="Nunito Sans"/>
               </a:rPr>
-              <a:t>艾托尔写道：“我不去迪伦的生日会了。”迈亚伦本可以回答：“你真没礼貌！”但她写的是：“你是说你不想去，还是说你去不了？”</a:t>
+              <a:t>一个男孩写道：“我不去一个同学的生日会了。”一个女孩本可以回答：“你真没礼貌！”但她写的是：“你是说你不想去，还是说你去不了？”</a:t>
             </a:r>
           </a:p>
         </p:txBody>
@@ -4177,7 +4177,7 @@
                 </a:solidFill>
                 <a:latin typeface="Nunito Sans"/>
               </a:rPr>
-              <a:t>迈亚伦没有回答她自己想象的东西：她先核实。</a:t>
+              <a:t>这个女孩没有回答她自己想象的东西：她先核实。</a:t>
             </a:r>
           </a:p>
           <a:p>
@@ -4202,7 +4202,7 @@
                 </a:solidFill>
                 <a:latin typeface="Nunito Sans"/>
               </a:rPr>
-              <a:t>她转述了：给出了理解艾托尔话的两种方式。</a:t>
+              <a:t>她转述了：给出了理解这个男孩话的两种方式。</a:t>
             </a:r>
           </a:p>
           <a:p>
@@ -4227,7 +4227,7 @@
                 </a:solidFill>
                 <a:latin typeface="Nunito Sans"/>
               </a:rPr>
-              <a:t>艾托尔回答：“我去不了，我有比赛。”他并不是没礼貌。</a:t>
+              <a:t>这个男孩回答：“我去不了，我有比赛。”他并不是没礼貌。</a:t>
             </a:r>
           </a:p>
           <a:p>
@@ -4438,7 +4438,7 @@
                 </a:solidFill>
                 <a:latin typeface="Nunito Sans"/>
               </a:rPr>
-              <a:t>陈对他爸爸说：“我需要一部新手机。”他爸爸没有说不行，而是问：“为什么？你的怎么了？”</a:t>
+              <a:t>一个男孩对他爸爸说：“我需要一部新手机。”他爸爸没有说不行，而是问：“为什么？你的怎么了？”</a:t>
             </a:r>
           </a:p>
         </p:txBody>
@@ -4511,7 +4511,7 @@
                 </a:solidFill>
                 <a:latin typeface="Nunito Sans"/>
               </a:rPr>
-              <a:t>陈得想一想：“电池连半个上午都撑不到。”</a:t>
+              <a:t>这个男孩得想一想：“电池连半个上午都撑不到。”</a:t>
             </a:r>
           </a:p>
           <a:p>
@@ -4747,7 +4747,7 @@
                 </a:solidFill>
                 <a:latin typeface="Nunito Sans"/>
               </a:rPr>
-              <a:t>奥马尔说他喜欢一部剧。迪伦劈头就问：“为什么？你怎么知道的？确定吗？这又是为什么？”也不等回答，为了让他出丑。</a:t>
+              <a:t>一个男孩说他喜欢一部剧。一个同学劈头就问：“为什么？你怎么知道的？确定吗？这又是为什么？”也不等回答，为了让他出丑。</a:t>
             </a:r>
           </a:p>
         </p:txBody>
@@ -4795,7 +4795,7 @@
                 </a:solidFill>
                 <a:latin typeface="Nunito Sans"/>
               </a:rPr>
-              <a:t>迪伦一直在要求理由。他对话得好吗？</a:t>
+              <a:t>这个同学一直在要求理由。他对话得好吗？</a:t>
             </a:r>
           </a:p>
           <a:p>
@@ -4870,7 +4870,7 @@
                 </a:solidFill>
                 <a:latin typeface="Nunito Sans"/>
               </a:rPr>
-              <a:t>另外，“我喜欢”是一种喜好：说的是奥马尔，不需要证明（第2课）。</a:t>
+              <a:t>另外，“我喜欢”是一种喜好：说的是这个男孩，不需要证明（第2课）。</a:t>
             </a:r>
           </a:p>
           <a:p>
@@ -6880,7 +6880,7 @@
                 </a:solidFill>
                 <a:latin typeface="Nunito Sans"/>
               </a:rPr>
-              <a:t>娜亚拉发来一段两分钟的语音。凯文一边玩游戏一边用两倍速听，然后回答：“嗯，不过……”</a:t>
+              <a:t>一个女孩发来一段两分钟的语音。一个男孩一边玩游戏一边用两倍速听，然后回答：“嗯，不过……”</a:t>
             </a:r>
           </a:p>
         </p:txBody>
@@ -6919,7 +6919,7 @@
                 </a:solidFill>
                 <a:latin typeface="Nunito Sans"/>
               </a:rPr>
-              <a:t>凯文听了娜亚拉的话吗？</a:t>
+              <a:t>这个男孩听了这个女孩的话吗？</a:t>
             </a:r>
           </a:p>
         </p:txBody>
